--- a/AI-CoE-How-To-Use.pptx
+++ b/AI-CoE-How-To-Use.pptx
@@ -1276,7 +1276,7 @@
           <a:p>
             <a:r>
               <a:rPr lang="en-US" dirty="0"/>
-              <a:t>60-second recap. Do not deep-dive — anyone in the room who needs the full pitch should read the pitch deck. Anchor on three things: 5+1 pillars, two streams, ATO funding.</a:t>
+              <a:t>60-second recap. Do not deep-dive — anyone in the room who needs the full pitch should read the pitch deck. Anchor on three things: 5+1 pillars, three streams, ATO funding.</a:t>
             </a:r>
           </a:p>
         </p:txBody>
@@ -11536,7 +11536,7 @@
                 <a:ea typeface="Segoe UI" pitchFamily="34" charset="-122"/>
                 <a:cs typeface="Segoe UI" pitchFamily="34" charset="-120"/>
               </a:rPr>
-              <a:t>External narrative · 18 slides</a:t>
+              <a:t>External narrative · 19 slides</a:t>
             </a:r>
             <a:endParaRPr lang="en-US" sz="1100" dirty="0"/>
           </a:p>

--- a/AI-CoE-How-To-Use.pptx
+++ b/AI-CoE-How-To-Use.pptx
@@ -2540,6 +2540,226 @@
           </a:p>
         </p:txBody>
       </p:sp>
+      <p:sp>
+        <p:nvSpPr>
+          <p:cNvPr id="12" name="AICOE_GEO_ACCENT_Right Triangle 11"/>
+          <p:cNvSpPr/>
+          <p:nvPr/>
+        </p:nvSpPr>
+        <p:spPr>
+          <a:xfrm>
+            <a:off x="11369040" y="445770"/>
+            <a:ext cx="822960" cy="822960"/>
+          </a:xfrm>
+          <a:prstGeom prst="rtTriangle">
+            <a:avLst/>
+          </a:prstGeom>
+          <a:solidFill>
+            <a:srgbClr val="0B1F3A"/>
+          </a:solidFill>
+          <a:ln>
+            <a:noFill/>
+          </a:ln>
+          <a:effectLst/>
+        </p:spPr>
+        <p:style>
+          <a:lnRef idx="1">
+            <a:schemeClr val="accent1"/>
+          </a:lnRef>
+          <a:fillRef idx="3">
+            <a:schemeClr val="accent1"/>
+          </a:fillRef>
+          <a:effectRef idx="2">
+            <a:schemeClr val="accent1"/>
+          </a:effectRef>
+          <a:fontRef idx="minor">
+            <a:schemeClr val="lt1"/>
+          </a:fontRef>
+        </p:style>
+        <p:txBody>
+          <a:bodyPr rtlCol="0" anchor="ctr"/>
+          <a:lstStyle/>
+          <a:p>
+            <a:pPr algn="ctr"/>
+          </a:p>
+        </p:txBody>
+      </p:sp>
+      <p:sp>
+        <p:nvSpPr>
+          <p:cNvPr id="13" name="AICOE_GEO_ACCENT_Right Triangle 12"/>
+          <p:cNvSpPr/>
+          <p:nvPr/>
+        </p:nvSpPr>
+        <p:spPr>
+          <a:xfrm rot="10800000">
+            <a:off x="11369040" y="2160270"/>
+            <a:ext cx="822960" cy="822960"/>
+          </a:xfrm>
+          <a:prstGeom prst="rtTriangle">
+            <a:avLst/>
+          </a:prstGeom>
+          <a:solidFill>
+            <a:srgbClr val="50E6FF"/>
+          </a:solidFill>
+          <a:ln>
+            <a:noFill/>
+          </a:ln>
+          <a:effectLst/>
+        </p:spPr>
+        <p:style>
+          <a:lnRef idx="1">
+            <a:schemeClr val="accent1"/>
+          </a:lnRef>
+          <a:fillRef idx="3">
+            <a:schemeClr val="accent1"/>
+          </a:fillRef>
+          <a:effectRef idx="2">
+            <a:schemeClr val="accent1"/>
+          </a:effectRef>
+          <a:fontRef idx="minor">
+            <a:schemeClr val="lt1"/>
+          </a:fontRef>
+        </p:style>
+        <p:txBody>
+          <a:bodyPr rtlCol="0" anchor="ctr"/>
+          <a:lstStyle/>
+          <a:p>
+            <a:pPr algn="ctr"/>
+          </a:p>
+        </p:txBody>
+      </p:sp>
+      <p:sp>
+        <p:nvSpPr>
+          <p:cNvPr id="14" name="AICOE_GEO_ACCENT_Right Triangle 13"/>
+          <p:cNvSpPr/>
+          <p:nvPr/>
+        </p:nvSpPr>
+        <p:spPr>
+          <a:xfrm>
+            <a:off x="11369040" y="3874770"/>
+            <a:ext cx="822960" cy="822960"/>
+          </a:xfrm>
+          <a:prstGeom prst="rtTriangle">
+            <a:avLst/>
+          </a:prstGeom>
+          <a:solidFill>
+            <a:srgbClr val="0067B8"/>
+          </a:solidFill>
+          <a:ln>
+            <a:noFill/>
+          </a:ln>
+          <a:effectLst/>
+        </p:spPr>
+        <p:style>
+          <a:lnRef idx="1">
+            <a:schemeClr val="accent1"/>
+          </a:lnRef>
+          <a:fillRef idx="3">
+            <a:schemeClr val="accent1"/>
+          </a:fillRef>
+          <a:effectRef idx="2">
+            <a:schemeClr val="accent1"/>
+          </a:effectRef>
+          <a:fontRef idx="minor">
+            <a:schemeClr val="lt1"/>
+          </a:fontRef>
+        </p:style>
+        <p:txBody>
+          <a:bodyPr rtlCol="0" anchor="ctr"/>
+          <a:lstStyle/>
+          <a:p>
+            <a:pPr algn="ctr"/>
+          </a:p>
+        </p:txBody>
+      </p:sp>
+      <p:sp>
+        <p:nvSpPr>
+          <p:cNvPr id="15" name="AICOE_GEO_ACCENT_Right Triangle 14"/>
+          <p:cNvSpPr/>
+          <p:nvPr/>
+        </p:nvSpPr>
+        <p:spPr>
+          <a:xfrm rot="5400000">
+            <a:off x="11369040" y="5589270"/>
+            <a:ext cx="822960" cy="822960"/>
+          </a:xfrm>
+          <a:prstGeom prst="rtTriangle">
+            <a:avLst/>
+          </a:prstGeom>
+          <a:solidFill>
+            <a:srgbClr val="50E6FF"/>
+          </a:solidFill>
+          <a:ln>
+            <a:noFill/>
+          </a:ln>
+          <a:effectLst/>
+        </p:spPr>
+        <p:style>
+          <a:lnRef idx="1">
+            <a:schemeClr val="accent1"/>
+          </a:lnRef>
+          <a:fillRef idx="3">
+            <a:schemeClr val="accent1"/>
+          </a:fillRef>
+          <a:effectRef idx="2">
+            <a:schemeClr val="accent1"/>
+          </a:effectRef>
+          <a:fontRef idx="minor">
+            <a:schemeClr val="lt1"/>
+          </a:fontRef>
+        </p:style>
+        <p:txBody>
+          <a:bodyPr rtlCol="0" anchor="ctr"/>
+          <a:lstStyle/>
+          <a:p>
+            <a:pPr algn="ctr"/>
+          </a:p>
+        </p:txBody>
+      </p:sp>
+      <p:sp>
+        <p:nvSpPr>
+          <p:cNvPr id="16" name="AICOE_GEO_ACCENT_Rectangle 15"/>
+          <p:cNvSpPr/>
+          <p:nvPr/>
+        </p:nvSpPr>
+        <p:spPr>
+          <a:xfrm>
+            <a:off x="11295888" y="0"/>
+            <a:ext cx="73152" cy="6858000"/>
+          </a:xfrm>
+          <a:prstGeom prst="rect">
+            <a:avLst/>
+          </a:prstGeom>
+          <a:solidFill>
+            <a:srgbClr val="0B1F3A"/>
+          </a:solidFill>
+          <a:ln>
+            <a:noFill/>
+          </a:ln>
+          <a:effectLst/>
+        </p:spPr>
+        <p:style>
+          <a:lnRef idx="1">
+            <a:schemeClr val="accent1"/>
+          </a:lnRef>
+          <a:fillRef idx="3">
+            <a:schemeClr val="accent1"/>
+          </a:fillRef>
+          <a:effectRef idx="2">
+            <a:schemeClr val="accent1"/>
+          </a:effectRef>
+          <a:fontRef idx="minor">
+            <a:schemeClr val="lt1"/>
+          </a:fontRef>
+        </p:style>
+        <p:txBody>
+          <a:bodyPr rtlCol="0" anchor="ctr"/>
+          <a:lstStyle/>
+          <a:p>
+            <a:pPr algn="ctr"/>
+          </a:p>
+        </p:txBody>
+      </p:sp>
     </p:spTree>
   </p:cSld>
   <p:clrMapOvr>
@@ -4331,6 +4551,94 @@
           </a:p>
         </p:txBody>
       </p:sp>
+      <p:sp>
+        <p:nvSpPr>
+          <p:cNvPr id="50" name="AICOE_GEO_ACCENT_Right Triangle 49"/>
+          <p:cNvSpPr/>
+          <p:nvPr/>
+        </p:nvSpPr>
+        <p:spPr>
+          <a:xfrm rot="5400000">
+            <a:off x="11762232" y="109728"/>
+            <a:ext cx="320040" cy="320040"/>
+          </a:xfrm>
+          <a:prstGeom prst="rtTriangle">
+            <a:avLst/>
+          </a:prstGeom>
+          <a:solidFill>
+            <a:srgbClr val="0B1F3A"/>
+          </a:solidFill>
+          <a:ln>
+            <a:noFill/>
+          </a:ln>
+          <a:effectLst/>
+        </p:spPr>
+        <p:style>
+          <a:lnRef idx="1">
+            <a:schemeClr val="accent1"/>
+          </a:lnRef>
+          <a:fillRef idx="3">
+            <a:schemeClr val="accent1"/>
+          </a:fillRef>
+          <a:effectRef idx="2">
+            <a:schemeClr val="accent1"/>
+          </a:effectRef>
+          <a:fontRef idx="minor">
+            <a:schemeClr val="lt1"/>
+          </a:fontRef>
+        </p:style>
+        <p:txBody>
+          <a:bodyPr rtlCol="0" anchor="ctr"/>
+          <a:lstStyle/>
+          <a:p>
+            <a:pPr algn="ctr"/>
+          </a:p>
+        </p:txBody>
+      </p:sp>
+      <p:sp>
+        <p:nvSpPr>
+          <p:cNvPr id="51" name="AICOE_GEO_ACCENT_Right Triangle 50"/>
+          <p:cNvSpPr/>
+          <p:nvPr/>
+        </p:nvSpPr>
+        <p:spPr>
+          <a:xfrm rot="5400000">
+            <a:off x="11874246" y="109728"/>
+            <a:ext cx="208026" cy="208026"/>
+          </a:xfrm>
+          <a:prstGeom prst="rtTriangle">
+            <a:avLst/>
+          </a:prstGeom>
+          <a:solidFill>
+            <a:srgbClr val="50E6FF"/>
+          </a:solidFill>
+          <a:ln>
+            <a:noFill/>
+          </a:ln>
+          <a:effectLst/>
+        </p:spPr>
+        <p:style>
+          <a:lnRef idx="1">
+            <a:schemeClr val="accent1"/>
+          </a:lnRef>
+          <a:fillRef idx="3">
+            <a:schemeClr val="accent1"/>
+          </a:fillRef>
+          <a:effectRef idx="2">
+            <a:schemeClr val="accent1"/>
+          </a:effectRef>
+          <a:fontRef idx="minor">
+            <a:schemeClr val="lt1"/>
+          </a:fontRef>
+        </p:style>
+        <p:txBody>
+          <a:bodyPr rtlCol="0" anchor="ctr"/>
+          <a:lstStyle/>
+          <a:p>
+            <a:pPr algn="ctr"/>
+          </a:p>
+        </p:txBody>
+      </p:sp>
     </p:spTree>
   </p:cSld>
   <p:clrMapOvr>
@@ -5837,6 +6145,94 @@
           </a:p>
         </p:txBody>
       </p:sp>
+      <p:sp>
+        <p:nvSpPr>
+          <p:cNvPr id="43" name="AICOE_GEO_ACCENT_Right Triangle 42"/>
+          <p:cNvSpPr/>
+          <p:nvPr/>
+        </p:nvSpPr>
+        <p:spPr>
+          <a:xfrm rot="5400000">
+            <a:off x="11762232" y="109728"/>
+            <a:ext cx="320040" cy="320040"/>
+          </a:xfrm>
+          <a:prstGeom prst="rtTriangle">
+            <a:avLst/>
+          </a:prstGeom>
+          <a:solidFill>
+            <a:srgbClr val="0B1F3A"/>
+          </a:solidFill>
+          <a:ln>
+            <a:noFill/>
+          </a:ln>
+          <a:effectLst/>
+        </p:spPr>
+        <p:style>
+          <a:lnRef idx="1">
+            <a:schemeClr val="accent1"/>
+          </a:lnRef>
+          <a:fillRef idx="3">
+            <a:schemeClr val="accent1"/>
+          </a:fillRef>
+          <a:effectRef idx="2">
+            <a:schemeClr val="accent1"/>
+          </a:effectRef>
+          <a:fontRef idx="minor">
+            <a:schemeClr val="lt1"/>
+          </a:fontRef>
+        </p:style>
+        <p:txBody>
+          <a:bodyPr rtlCol="0" anchor="ctr"/>
+          <a:lstStyle/>
+          <a:p>
+            <a:pPr algn="ctr"/>
+          </a:p>
+        </p:txBody>
+      </p:sp>
+      <p:sp>
+        <p:nvSpPr>
+          <p:cNvPr id="44" name="AICOE_GEO_ACCENT_Right Triangle 43"/>
+          <p:cNvSpPr/>
+          <p:nvPr/>
+        </p:nvSpPr>
+        <p:spPr>
+          <a:xfrm rot="5400000">
+            <a:off x="11874246" y="109728"/>
+            <a:ext cx="208026" cy="208026"/>
+          </a:xfrm>
+          <a:prstGeom prst="rtTriangle">
+            <a:avLst/>
+          </a:prstGeom>
+          <a:solidFill>
+            <a:srgbClr val="50E6FF"/>
+          </a:solidFill>
+          <a:ln>
+            <a:noFill/>
+          </a:ln>
+          <a:effectLst/>
+        </p:spPr>
+        <p:style>
+          <a:lnRef idx="1">
+            <a:schemeClr val="accent1"/>
+          </a:lnRef>
+          <a:fillRef idx="3">
+            <a:schemeClr val="accent1"/>
+          </a:fillRef>
+          <a:effectRef idx="2">
+            <a:schemeClr val="accent1"/>
+          </a:effectRef>
+          <a:fontRef idx="minor">
+            <a:schemeClr val="lt1"/>
+          </a:fontRef>
+        </p:style>
+        <p:txBody>
+          <a:bodyPr rtlCol="0" anchor="ctr"/>
+          <a:lstStyle/>
+          <a:p>
+            <a:pPr algn="ctr"/>
+          </a:p>
+        </p:txBody>
+      </p:sp>
     </p:spTree>
   </p:cSld>
   <p:clrMapOvr>
@@ -7214,6 +7610,94 @@
           </a:p>
         </p:txBody>
       </p:sp>
+      <p:sp>
+        <p:nvSpPr>
+          <p:cNvPr id="39" name="AICOE_GEO_ACCENT_Right Triangle 38"/>
+          <p:cNvSpPr/>
+          <p:nvPr/>
+        </p:nvSpPr>
+        <p:spPr>
+          <a:xfrm rot="5400000">
+            <a:off x="11762232" y="109728"/>
+            <a:ext cx="320040" cy="320040"/>
+          </a:xfrm>
+          <a:prstGeom prst="rtTriangle">
+            <a:avLst/>
+          </a:prstGeom>
+          <a:solidFill>
+            <a:srgbClr val="0B1F3A"/>
+          </a:solidFill>
+          <a:ln>
+            <a:noFill/>
+          </a:ln>
+          <a:effectLst/>
+        </p:spPr>
+        <p:style>
+          <a:lnRef idx="1">
+            <a:schemeClr val="accent1"/>
+          </a:lnRef>
+          <a:fillRef idx="3">
+            <a:schemeClr val="accent1"/>
+          </a:fillRef>
+          <a:effectRef idx="2">
+            <a:schemeClr val="accent1"/>
+          </a:effectRef>
+          <a:fontRef idx="minor">
+            <a:schemeClr val="lt1"/>
+          </a:fontRef>
+        </p:style>
+        <p:txBody>
+          <a:bodyPr rtlCol="0" anchor="ctr"/>
+          <a:lstStyle/>
+          <a:p>
+            <a:pPr algn="ctr"/>
+          </a:p>
+        </p:txBody>
+      </p:sp>
+      <p:sp>
+        <p:nvSpPr>
+          <p:cNvPr id="40" name="AICOE_GEO_ACCENT_Right Triangle 39"/>
+          <p:cNvSpPr/>
+          <p:nvPr/>
+        </p:nvSpPr>
+        <p:spPr>
+          <a:xfrm rot="5400000">
+            <a:off x="11874246" y="109728"/>
+            <a:ext cx="208026" cy="208026"/>
+          </a:xfrm>
+          <a:prstGeom prst="rtTriangle">
+            <a:avLst/>
+          </a:prstGeom>
+          <a:solidFill>
+            <a:srgbClr val="50E6FF"/>
+          </a:solidFill>
+          <a:ln>
+            <a:noFill/>
+          </a:ln>
+          <a:effectLst/>
+        </p:spPr>
+        <p:style>
+          <a:lnRef idx="1">
+            <a:schemeClr val="accent1"/>
+          </a:lnRef>
+          <a:fillRef idx="3">
+            <a:schemeClr val="accent1"/>
+          </a:fillRef>
+          <a:effectRef idx="2">
+            <a:schemeClr val="accent1"/>
+          </a:effectRef>
+          <a:fontRef idx="minor">
+            <a:schemeClr val="lt1"/>
+          </a:fontRef>
+        </p:style>
+        <p:txBody>
+          <a:bodyPr rtlCol="0" anchor="ctr"/>
+          <a:lstStyle/>
+          <a:p>
+            <a:pPr algn="ctr"/>
+          </a:p>
+        </p:txBody>
+      </p:sp>
     </p:spTree>
   </p:cSld>
   <p:clrMapOvr>
@@ -9765,6 +10249,94 @@
           </a:p>
         </p:txBody>
       </p:sp>
+      <p:sp>
+        <p:nvSpPr>
+          <p:cNvPr id="73" name="AICOE_GEO_ACCENT_Right Triangle 72"/>
+          <p:cNvSpPr/>
+          <p:nvPr/>
+        </p:nvSpPr>
+        <p:spPr>
+          <a:xfrm rot="5400000">
+            <a:off x="11762232" y="109728"/>
+            <a:ext cx="320040" cy="320040"/>
+          </a:xfrm>
+          <a:prstGeom prst="rtTriangle">
+            <a:avLst/>
+          </a:prstGeom>
+          <a:solidFill>
+            <a:srgbClr val="0B1F3A"/>
+          </a:solidFill>
+          <a:ln>
+            <a:noFill/>
+          </a:ln>
+          <a:effectLst/>
+        </p:spPr>
+        <p:style>
+          <a:lnRef idx="1">
+            <a:schemeClr val="accent1"/>
+          </a:lnRef>
+          <a:fillRef idx="3">
+            <a:schemeClr val="accent1"/>
+          </a:fillRef>
+          <a:effectRef idx="2">
+            <a:schemeClr val="accent1"/>
+          </a:effectRef>
+          <a:fontRef idx="minor">
+            <a:schemeClr val="lt1"/>
+          </a:fontRef>
+        </p:style>
+        <p:txBody>
+          <a:bodyPr rtlCol="0" anchor="ctr"/>
+          <a:lstStyle/>
+          <a:p>
+            <a:pPr algn="ctr"/>
+          </a:p>
+        </p:txBody>
+      </p:sp>
+      <p:sp>
+        <p:nvSpPr>
+          <p:cNvPr id="74" name="AICOE_GEO_ACCENT_Right Triangle 73"/>
+          <p:cNvSpPr/>
+          <p:nvPr/>
+        </p:nvSpPr>
+        <p:spPr>
+          <a:xfrm rot="5400000">
+            <a:off x="11874246" y="109728"/>
+            <a:ext cx="208026" cy="208026"/>
+          </a:xfrm>
+          <a:prstGeom prst="rtTriangle">
+            <a:avLst/>
+          </a:prstGeom>
+          <a:solidFill>
+            <a:srgbClr val="50E6FF"/>
+          </a:solidFill>
+          <a:ln>
+            <a:noFill/>
+          </a:ln>
+          <a:effectLst/>
+        </p:spPr>
+        <p:style>
+          <a:lnRef idx="1">
+            <a:schemeClr val="accent1"/>
+          </a:lnRef>
+          <a:fillRef idx="3">
+            <a:schemeClr val="accent1"/>
+          </a:fillRef>
+          <a:effectRef idx="2">
+            <a:schemeClr val="accent1"/>
+          </a:effectRef>
+          <a:fontRef idx="minor">
+            <a:schemeClr val="lt1"/>
+          </a:fontRef>
+        </p:style>
+        <p:txBody>
+          <a:bodyPr rtlCol="0" anchor="ctr"/>
+          <a:lstStyle/>
+          <a:p>
+            <a:pPr algn="ctr"/>
+          </a:p>
+        </p:txBody>
+      </p:sp>
     </p:spTree>
   </p:cSld>
   <p:clrMapOvr>
@@ -11087,6 +11659,94 @@
           </a:p>
         </p:txBody>
       </p:sp>
+      <p:sp>
+        <p:nvSpPr>
+          <p:cNvPr id="36" name="AICOE_GEO_ACCENT_Right Triangle 35"/>
+          <p:cNvSpPr/>
+          <p:nvPr/>
+        </p:nvSpPr>
+        <p:spPr>
+          <a:xfrm rot="5400000">
+            <a:off x="11762232" y="109728"/>
+            <a:ext cx="320040" cy="320040"/>
+          </a:xfrm>
+          <a:prstGeom prst="rtTriangle">
+            <a:avLst/>
+          </a:prstGeom>
+          <a:solidFill>
+            <a:srgbClr val="0B1F3A"/>
+          </a:solidFill>
+          <a:ln>
+            <a:noFill/>
+          </a:ln>
+          <a:effectLst/>
+        </p:spPr>
+        <p:style>
+          <a:lnRef idx="1">
+            <a:schemeClr val="accent1"/>
+          </a:lnRef>
+          <a:fillRef idx="3">
+            <a:schemeClr val="accent1"/>
+          </a:fillRef>
+          <a:effectRef idx="2">
+            <a:schemeClr val="accent1"/>
+          </a:effectRef>
+          <a:fontRef idx="minor">
+            <a:schemeClr val="lt1"/>
+          </a:fontRef>
+        </p:style>
+        <p:txBody>
+          <a:bodyPr rtlCol="0" anchor="ctr"/>
+          <a:lstStyle/>
+          <a:p>
+            <a:pPr algn="ctr"/>
+          </a:p>
+        </p:txBody>
+      </p:sp>
+      <p:sp>
+        <p:nvSpPr>
+          <p:cNvPr id="37" name="AICOE_GEO_ACCENT_Right Triangle 36"/>
+          <p:cNvSpPr/>
+          <p:nvPr/>
+        </p:nvSpPr>
+        <p:spPr>
+          <a:xfrm rot="5400000">
+            <a:off x="11874246" y="109728"/>
+            <a:ext cx="208026" cy="208026"/>
+          </a:xfrm>
+          <a:prstGeom prst="rtTriangle">
+            <a:avLst/>
+          </a:prstGeom>
+          <a:solidFill>
+            <a:srgbClr val="50E6FF"/>
+          </a:solidFill>
+          <a:ln>
+            <a:noFill/>
+          </a:ln>
+          <a:effectLst/>
+        </p:spPr>
+        <p:style>
+          <a:lnRef idx="1">
+            <a:schemeClr val="accent1"/>
+          </a:lnRef>
+          <a:fillRef idx="3">
+            <a:schemeClr val="accent1"/>
+          </a:fillRef>
+          <a:effectRef idx="2">
+            <a:schemeClr val="accent1"/>
+          </a:effectRef>
+          <a:fontRef idx="minor">
+            <a:schemeClr val="lt1"/>
+          </a:fontRef>
+        </p:style>
+        <p:txBody>
+          <a:bodyPr rtlCol="0" anchor="ctr"/>
+          <a:lstStyle/>
+          <a:p>
+            <a:pPr algn="ctr"/>
+          </a:p>
+        </p:txBody>
+      </p:sp>
     </p:spTree>
   </p:cSld>
   <p:clrMapOvr>
@@ -12434,6 +13094,94 @@
           </a:p>
         </p:txBody>
       </p:sp>
+      <p:sp>
+        <p:nvSpPr>
+          <p:cNvPr id="39" name="AICOE_GEO_ACCENT_Right Triangle 38"/>
+          <p:cNvSpPr/>
+          <p:nvPr/>
+        </p:nvSpPr>
+        <p:spPr>
+          <a:xfrm rot="5400000">
+            <a:off x="11762232" y="109728"/>
+            <a:ext cx="320040" cy="320040"/>
+          </a:xfrm>
+          <a:prstGeom prst="rtTriangle">
+            <a:avLst/>
+          </a:prstGeom>
+          <a:solidFill>
+            <a:srgbClr val="0B1F3A"/>
+          </a:solidFill>
+          <a:ln>
+            <a:noFill/>
+          </a:ln>
+          <a:effectLst/>
+        </p:spPr>
+        <p:style>
+          <a:lnRef idx="1">
+            <a:schemeClr val="accent1"/>
+          </a:lnRef>
+          <a:fillRef idx="3">
+            <a:schemeClr val="accent1"/>
+          </a:fillRef>
+          <a:effectRef idx="2">
+            <a:schemeClr val="accent1"/>
+          </a:effectRef>
+          <a:fontRef idx="minor">
+            <a:schemeClr val="lt1"/>
+          </a:fontRef>
+        </p:style>
+        <p:txBody>
+          <a:bodyPr rtlCol="0" anchor="ctr"/>
+          <a:lstStyle/>
+          <a:p>
+            <a:pPr algn="ctr"/>
+          </a:p>
+        </p:txBody>
+      </p:sp>
+      <p:sp>
+        <p:nvSpPr>
+          <p:cNvPr id="40" name="AICOE_GEO_ACCENT_Right Triangle 39"/>
+          <p:cNvSpPr/>
+          <p:nvPr/>
+        </p:nvSpPr>
+        <p:spPr>
+          <a:xfrm rot="5400000">
+            <a:off x="11874246" y="109728"/>
+            <a:ext cx="208026" cy="208026"/>
+          </a:xfrm>
+          <a:prstGeom prst="rtTriangle">
+            <a:avLst/>
+          </a:prstGeom>
+          <a:solidFill>
+            <a:srgbClr val="50E6FF"/>
+          </a:solidFill>
+          <a:ln>
+            <a:noFill/>
+          </a:ln>
+          <a:effectLst/>
+        </p:spPr>
+        <p:style>
+          <a:lnRef idx="1">
+            <a:schemeClr val="accent1"/>
+          </a:lnRef>
+          <a:fillRef idx="3">
+            <a:schemeClr val="accent1"/>
+          </a:fillRef>
+          <a:effectRef idx="2">
+            <a:schemeClr val="accent1"/>
+          </a:effectRef>
+          <a:fontRef idx="minor">
+            <a:schemeClr val="lt1"/>
+          </a:fontRef>
+        </p:style>
+        <p:txBody>
+          <a:bodyPr rtlCol="0" anchor="ctr"/>
+          <a:lstStyle/>
+          <a:p>
+            <a:pPr algn="ctr"/>
+          </a:p>
+        </p:txBody>
+      </p:sp>
     </p:spTree>
   </p:cSld>
   <p:clrMapOvr>
@@ -13817,6 +14565,94 @@
           </a:p>
         </p:txBody>
       </p:sp>
+      <p:sp>
+        <p:nvSpPr>
+          <p:cNvPr id="39" name="AICOE_GEO_ACCENT_Right Triangle 38"/>
+          <p:cNvSpPr/>
+          <p:nvPr/>
+        </p:nvSpPr>
+        <p:spPr>
+          <a:xfrm rot="5400000">
+            <a:off x="11762232" y="109728"/>
+            <a:ext cx="320040" cy="320040"/>
+          </a:xfrm>
+          <a:prstGeom prst="rtTriangle">
+            <a:avLst/>
+          </a:prstGeom>
+          <a:solidFill>
+            <a:srgbClr val="0B1F3A"/>
+          </a:solidFill>
+          <a:ln>
+            <a:noFill/>
+          </a:ln>
+          <a:effectLst/>
+        </p:spPr>
+        <p:style>
+          <a:lnRef idx="1">
+            <a:schemeClr val="accent1"/>
+          </a:lnRef>
+          <a:fillRef idx="3">
+            <a:schemeClr val="accent1"/>
+          </a:fillRef>
+          <a:effectRef idx="2">
+            <a:schemeClr val="accent1"/>
+          </a:effectRef>
+          <a:fontRef idx="minor">
+            <a:schemeClr val="lt1"/>
+          </a:fontRef>
+        </p:style>
+        <p:txBody>
+          <a:bodyPr rtlCol="0" anchor="ctr"/>
+          <a:lstStyle/>
+          <a:p>
+            <a:pPr algn="ctr"/>
+          </a:p>
+        </p:txBody>
+      </p:sp>
+      <p:sp>
+        <p:nvSpPr>
+          <p:cNvPr id="40" name="AICOE_GEO_ACCENT_Right Triangle 39"/>
+          <p:cNvSpPr/>
+          <p:nvPr/>
+        </p:nvSpPr>
+        <p:spPr>
+          <a:xfrm rot="5400000">
+            <a:off x="11874246" y="109728"/>
+            <a:ext cx="208026" cy="208026"/>
+          </a:xfrm>
+          <a:prstGeom prst="rtTriangle">
+            <a:avLst/>
+          </a:prstGeom>
+          <a:solidFill>
+            <a:srgbClr val="50E6FF"/>
+          </a:solidFill>
+          <a:ln>
+            <a:noFill/>
+          </a:ln>
+          <a:effectLst/>
+        </p:spPr>
+        <p:style>
+          <a:lnRef idx="1">
+            <a:schemeClr val="accent1"/>
+          </a:lnRef>
+          <a:fillRef idx="3">
+            <a:schemeClr val="accent1"/>
+          </a:fillRef>
+          <a:effectRef idx="2">
+            <a:schemeClr val="accent1"/>
+          </a:effectRef>
+          <a:fontRef idx="minor">
+            <a:schemeClr val="lt1"/>
+          </a:fontRef>
+        </p:style>
+        <p:txBody>
+          <a:bodyPr rtlCol="0" anchor="ctr"/>
+          <a:lstStyle/>
+          <a:p>
+            <a:pPr algn="ctr"/>
+          </a:p>
+        </p:txBody>
+      </p:sp>
     </p:spTree>
   </p:cSld>
   <p:clrMapOvr>
@@ -15808,6 +16644,94 @@
           </a:p>
         </p:txBody>
       </p:sp>
+      <p:sp>
+        <p:nvSpPr>
+          <p:cNvPr id="57" name="AICOE_GEO_ACCENT_Right Triangle 56"/>
+          <p:cNvSpPr/>
+          <p:nvPr/>
+        </p:nvSpPr>
+        <p:spPr>
+          <a:xfrm rot="5400000">
+            <a:off x="11762232" y="109728"/>
+            <a:ext cx="320040" cy="320040"/>
+          </a:xfrm>
+          <a:prstGeom prst="rtTriangle">
+            <a:avLst/>
+          </a:prstGeom>
+          <a:solidFill>
+            <a:srgbClr val="0B1F3A"/>
+          </a:solidFill>
+          <a:ln>
+            <a:noFill/>
+          </a:ln>
+          <a:effectLst/>
+        </p:spPr>
+        <p:style>
+          <a:lnRef idx="1">
+            <a:schemeClr val="accent1"/>
+          </a:lnRef>
+          <a:fillRef idx="3">
+            <a:schemeClr val="accent1"/>
+          </a:fillRef>
+          <a:effectRef idx="2">
+            <a:schemeClr val="accent1"/>
+          </a:effectRef>
+          <a:fontRef idx="minor">
+            <a:schemeClr val="lt1"/>
+          </a:fontRef>
+        </p:style>
+        <p:txBody>
+          <a:bodyPr rtlCol="0" anchor="ctr"/>
+          <a:lstStyle/>
+          <a:p>
+            <a:pPr algn="ctr"/>
+          </a:p>
+        </p:txBody>
+      </p:sp>
+      <p:sp>
+        <p:nvSpPr>
+          <p:cNvPr id="58" name="AICOE_GEO_ACCENT_Right Triangle 57"/>
+          <p:cNvSpPr/>
+          <p:nvPr/>
+        </p:nvSpPr>
+        <p:spPr>
+          <a:xfrm rot="5400000">
+            <a:off x="11874246" y="109728"/>
+            <a:ext cx="208026" cy="208026"/>
+          </a:xfrm>
+          <a:prstGeom prst="rtTriangle">
+            <a:avLst/>
+          </a:prstGeom>
+          <a:solidFill>
+            <a:srgbClr val="50E6FF"/>
+          </a:solidFill>
+          <a:ln>
+            <a:noFill/>
+          </a:ln>
+          <a:effectLst/>
+        </p:spPr>
+        <p:style>
+          <a:lnRef idx="1">
+            <a:schemeClr val="accent1"/>
+          </a:lnRef>
+          <a:fillRef idx="3">
+            <a:schemeClr val="accent1"/>
+          </a:fillRef>
+          <a:effectRef idx="2">
+            <a:schemeClr val="accent1"/>
+          </a:effectRef>
+          <a:fontRef idx="minor">
+            <a:schemeClr val="lt1"/>
+          </a:fontRef>
+        </p:style>
+        <p:txBody>
+          <a:bodyPr rtlCol="0" anchor="ctr"/>
+          <a:lstStyle/>
+          <a:p>
+            <a:pPr algn="ctr"/>
+          </a:p>
+        </p:txBody>
+      </p:sp>
     </p:spTree>
   </p:cSld>
   <p:clrMapOvr>
@@ -16674,6 +17598,94 @@
           </a:p>
         </p:txBody>
       </p:sp>
+      <p:sp>
+        <p:nvSpPr>
+          <p:cNvPr id="25" name="AICOE_GEO_ACCENT_Right Triangle 24"/>
+          <p:cNvSpPr/>
+          <p:nvPr/>
+        </p:nvSpPr>
+        <p:spPr>
+          <a:xfrm rot="5400000">
+            <a:off x="11762232" y="109728"/>
+            <a:ext cx="320040" cy="320040"/>
+          </a:xfrm>
+          <a:prstGeom prst="rtTriangle">
+            <a:avLst/>
+          </a:prstGeom>
+          <a:solidFill>
+            <a:srgbClr val="0B1F3A"/>
+          </a:solidFill>
+          <a:ln>
+            <a:noFill/>
+          </a:ln>
+          <a:effectLst/>
+        </p:spPr>
+        <p:style>
+          <a:lnRef idx="1">
+            <a:schemeClr val="accent1"/>
+          </a:lnRef>
+          <a:fillRef idx="3">
+            <a:schemeClr val="accent1"/>
+          </a:fillRef>
+          <a:effectRef idx="2">
+            <a:schemeClr val="accent1"/>
+          </a:effectRef>
+          <a:fontRef idx="minor">
+            <a:schemeClr val="lt1"/>
+          </a:fontRef>
+        </p:style>
+        <p:txBody>
+          <a:bodyPr rtlCol="0" anchor="ctr"/>
+          <a:lstStyle/>
+          <a:p>
+            <a:pPr algn="ctr"/>
+          </a:p>
+        </p:txBody>
+      </p:sp>
+      <p:sp>
+        <p:nvSpPr>
+          <p:cNvPr id="26" name="AICOE_GEO_ACCENT_Right Triangle 25"/>
+          <p:cNvSpPr/>
+          <p:nvPr/>
+        </p:nvSpPr>
+        <p:spPr>
+          <a:xfrm rot="5400000">
+            <a:off x="11874246" y="109728"/>
+            <a:ext cx="208026" cy="208026"/>
+          </a:xfrm>
+          <a:prstGeom prst="rtTriangle">
+            <a:avLst/>
+          </a:prstGeom>
+          <a:solidFill>
+            <a:srgbClr val="50E6FF"/>
+          </a:solidFill>
+          <a:ln>
+            <a:noFill/>
+          </a:ln>
+          <a:effectLst/>
+        </p:spPr>
+        <p:style>
+          <a:lnRef idx="1">
+            <a:schemeClr val="accent1"/>
+          </a:lnRef>
+          <a:fillRef idx="3">
+            <a:schemeClr val="accent1"/>
+          </a:fillRef>
+          <a:effectRef idx="2">
+            <a:schemeClr val="accent1"/>
+          </a:effectRef>
+          <a:fontRef idx="minor">
+            <a:schemeClr val="lt1"/>
+          </a:fontRef>
+        </p:style>
+        <p:txBody>
+          <a:bodyPr rtlCol="0" anchor="ctr"/>
+          <a:lstStyle/>
+          <a:p>
+            <a:pPr algn="ctr"/>
+          </a:p>
+        </p:txBody>
+      </p:sp>
     </p:spTree>
   </p:cSld>
   <p:clrMapOvr>
@@ -18075,6 +19087,94 @@
           </a:p>
         </p:txBody>
       </p:sp>
+      <p:sp>
+        <p:nvSpPr>
+          <p:cNvPr id="40" name="AICOE_GEO_ACCENT_Right Triangle 39"/>
+          <p:cNvSpPr/>
+          <p:nvPr/>
+        </p:nvSpPr>
+        <p:spPr>
+          <a:xfrm rot="5400000">
+            <a:off x="11762232" y="109728"/>
+            <a:ext cx="320040" cy="320040"/>
+          </a:xfrm>
+          <a:prstGeom prst="rtTriangle">
+            <a:avLst/>
+          </a:prstGeom>
+          <a:solidFill>
+            <a:srgbClr val="0B1F3A"/>
+          </a:solidFill>
+          <a:ln>
+            <a:noFill/>
+          </a:ln>
+          <a:effectLst/>
+        </p:spPr>
+        <p:style>
+          <a:lnRef idx="1">
+            <a:schemeClr val="accent1"/>
+          </a:lnRef>
+          <a:fillRef idx="3">
+            <a:schemeClr val="accent1"/>
+          </a:fillRef>
+          <a:effectRef idx="2">
+            <a:schemeClr val="accent1"/>
+          </a:effectRef>
+          <a:fontRef idx="minor">
+            <a:schemeClr val="lt1"/>
+          </a:fontRef>
+        </p:style>
+        <p:txBody>
+          <a:bodyPr rtlCol="0" anchor="ctr"/>
+          <a:lstStyle/>
+          <a:p>
+            <a:pPr algn="ctr"/>
+          </a:p>
+        </p:txBody>
+      </p:sp>
+      <p:sp>
+        <p:nvSpPr>
+          <p:cNvPr id="41" name="AICOE_GEO_ACCENT_Right Triangle 40"/>
+          <p:cNvSpPr/>
+          <p:nvPr/>
+        </p:nvSpPr>
+        <p:spPr>
+          <a:xfrm rot="5400000">
+            <a:off x="11874246" y="109728"/>
+            <a:ext cx="208026" cy="208026"/>
+          </a:xfrm>
+          <a:prstGeom prst="rtTriangle">
+            <a:avLst/>
+          </a:prstGeom>
+          <a:solidFill>
+            <a:srgbClr val="50E6FF"/>
+          </a:solidFill>
+          <a:ln>
+            <a:noFill/>
+          </a:ln>
+          <a:effectLst/>
+        </p:spPr>
+        <p:style>
+          <a:lnRef idx="1">
+            <a:schemeClr val="accent1"/>
+          </a:lnRef>
+          <a:fillRef idx="3">
+            <a:schemeClr val="accent1"/>
+          </a:fillRef>
+          <a:effectRef idx="2">
+            <a:schemeClr val="accent1"/>
+          </a:effectRef>
+          <a:fontRef idx="minor">
+            <a:schemeClr val="lt1"/>
+          </a:fontRef>
+        </p:style>
+        <p:txBody>
+          <a:bodyPr rtlCol="0" anchor="ctr"/>
+          <a:lstStyle/>
+          <a:p>
+            <a:pPr algn="ctr"/>
+          </a:p>
+        </p:txBody>
+      </p:sp>
     </p:spTree>
   </p:cSld>
   <p:clrMapOvr>
@@ -18930,6 +20030,94 @@
           </a:p>
         </p:txBody>
       </p:sp>
+      <p:sp>
+        <p:nvSpPr>
+          <p:cNvPr id="25" name="AICOE_GEO_ACCENT_Right Triangle 24"/>
+          <p:cNvSpPr/>
+          <p:nvPr/>
+        </p:nvSpPr>
+        <p:spPr>
+          <a:xfrm rot="5400000">
+            <a:off x="11762232" y="109728"/>
+            <a:ext cx="320040" cy="320040"/>
+          </a:xfrm>
+          <a:prstGeom prst="rtTriangle">
+            <a:avLst/>
+          </a:prstGeom>
+          <a:solidFill>
+            <a:srgbClr val="0B1F3A"/>
+          </a:solidFill>
+          <a:ln>
+            <a:noFill/>
+          </a:ln>
+          <a:effectLst/>
+        </p:spPr>
+        <p:style>
+          <a:lnRef idx="1">
+            <a:schemeClr val="accent1"/>
+          </a:lnRef>
+          <a:fillRef idx="3">
+            <a:schemeClr val="accent1"/>
+          </a:fillRef>
+          <a:effectRef idx="2">
+            <a:schemeClr val="accent1"/>
+          </a:effectRef>
+          <a:fontRef idx="minor">
+            <a:schemeClr val="lt1"/>
+          </a:fontRef>
+        </p:style>
+        <p:txBody>
+          <a:bodyPr rtlCol="0" anchor="ctr"/>
+          <a:lstStyle/>
+          <a:p>
+            <a:pPr algn="ctr"/>
+          </a:p>
+        </p:txBody>
+      </p:sp>
+      <p:sp>
+        <p:nvSpPr>
+          <p:cNvPr id="26" name="AICOE_GEO_ACCENT_Right Triangle 25"/>
+          <p:cNvSpPr/>
+          <p:nvPr/>
+        </p:nvSpPr>
+        <p:spPr>
+          <a:xfrm rot="5400000">
+            <a:off x="11874246" y="109728"/>
+            <a:ext cx="208026" cy="208026"/>
+          </a:xfrm>
+          <a:prstGeom prst="rtTriangle">
+            <a:avLst/>
+          </a:prstGeom>
+          <a:solidFill>
+            <a:srgbClr val="50E6FF"/>
+          </a:solidFill>
+          <a:ln>
+            <a:noFill/>
+          </a:ln>
+          <a:effectLst/>
+        </p:spPr>
+        <p:style>
+          <a:lnRef idx="1">
+            <a:schemeClr val="accent1"/>
+          </a:lnRef>
+          <a:fillRef idx="3">
+            <a:schemeClr val="accent1"/>
+          </a:fillRef>
+          <a:effectRef idx="2">
+            <a:schemeClr val="accent1"/>
+          </a:effectRef>
+          <a:fontRef idx="minor">
+            <a:schemeClr val="lt1"/>
+          </a:fontRef>
+        </p:style>
+        <p:txBody>
+          <a:bodyPr rtlCol="0" anchor="ctr"/>
+          <a:lstStyle/>
+          <a:p>
+            <a:pPr algn="ctr"/>
+          </a:p>
+        </p:txBody>
+      </p:sp>
     </p:spTree>
   </p:cSld>
   <p:clrMapOvr>
@@ -20369,6 +21557,94 @@
           </a:p>
         </p:txBody>
       </p:sp>
+      <p:sp>
+        <p:nvSpPr>
+          <p:cNvPr id="39" name="AICOE_GEO_ACCENT_Right Triangle 38"/>
+          <p:cNvSpPr/>
+          <p:nvPr/>
+        </p:nvSpPr>
+        <p:spPr>
+          <a:xfrm rot="5400000">
+            <a:off x="11762232" y="109728"/>
+            <a:ext cx="320040" cy="320040"/>
+          </a:xfrm>
+          <a:prstGeom prst="rtTriangle">
+            <a:avLst/>
+          </a:prstGeom>
+          <a:solidFill>
+            <a:srgbClr val="0B1F3A"/>
+          </a:solidFill>
+          <a:ln>
+            <a:noFill/>
+          </a:ln>
+          <a:effectLst/>
+        </p:spPr>
+        <p:style>
+          <a:lnRef idx="1">
+            <a:schemeClr val="accent1"/>
+          </a:lnRef>
+          <a:fillRef idx="3">
+            <a:schemeClr val="accent1"/>
+          </a:fillRef>
+          <a:effectRef idx="2">
+            <a:schemeClr val="accent1"/>
+          </a:effectRef>
+          <a:fontRef idx="minor">
+            <a:schemeClr val="lt1"/>
+          </a:fontRef>
+        </p:style>
+        <p:txBody>
+          <a:bodyPr rtlCol="0" anchor="ctr"/>
+          <a:lstStyle/>
+          <a:p>
+            <a:pPr algn="ctr"/>
+          </a:p>
+        </p:txBody>
+      </p:sp>
+      <p:sp>
+        <p:nvSpPr>
+          <p:cNvPr id="40" name="AICOE_GEO_ACCENT_Right Triangle 39"/>
+          <p:cNvSpPr/>
+          <p:nvPr/>
+        </p:nvSpPr>
+        <p:spPr>
+          <a:xfrm rot="5400000">
+            <a:off x="11874246" y="109728"/>
+            <a:ext cx="208026" cy="208026"/>
+          </a:xfrm>
+          <a:prstGeom prst="rtTriangle">
+            <a:avLst/>
+          </a:prstGeom>
+          <a:solidFill>
+            <a:srgbClr val="50E6FF"/>
+          </a:solidFill>
+          <a:ln>
+            <a:noFill/>
+          </a:ln>
+          <a:effectLst/>
+        </p:spPr>
+        <p:style>
+          <a:lnRef idx="1">
+            <a:schemeClr val="accent1"/>
+          </a:lnRef>
+          <a:fillRef idx="3">
+            <a:schemeClr val="accent1"/>
+          </a:fillRef>
+          <a:effectRef idx="2">
+            <a:schemeClr val="accent1"/>
+          </a:effectRef>
+          <a:fontRef idx="minor">
+            <a:schemeClr val="lt1"/>
+          </a:fontRef>
+        </p:style>
+        <p:txBody>
+          <a:bodyPr rtlCol="0" anchor="ctr"/>
+          <a:lstStyle/>
+          <a:p>
+            <a:pPr algn="ctr"/>
+          </a:p>
+        </p:txBody>
+      </p:sp>
     </p:spTree>
   </p:cSld>
   <p:clrMapOvr>
@@ -21842,6 +23118,94 @@
           </a:p>
         </p:txBody>
       </p:sp>
+      <p:sp>
+        <p:nvSpPr>
+          <p:cNvPr id="42" name="AICOE_GEO_ACCENT_Right Triangle 41"/>
+          <p:cNvSpPr/>
+          <p:nvPr/>
+        </p:nvSpPr>
+        <p:spPr>
+          <a:xfrm rot="5400000">
+            <a:off x="11762232" y="109728"/>
+            <a:ext cx="320040" cy="320040"/>
+          </a:xfrm>
+          <a:prstGeom prst="rtTriangle">
+            <a:avLst/>
+          </a:prstGeom>
+          <a:solidFill>
+            <a:srgbClr val="0B1F3A"/>
+          </a:solidFill>
+          <a:ln>
+            <a:noFill/>
+          </a:ln>
+          <a:effectLst/>
+        </p:spPr>
+        <p:style>
+          <a:lnRef idx="1">
+            <a:schemeClr val="accent1"/>
+          </a:lnRef>
+          <a:fillRef idx="3">
+            <a:schemeClr val="accent1"/>
+          </a:fillRef>
+          <a:effectRef idx="2">
+            <a:schemeClr val="accent1"/>
+          </a:effectRef>
+          <a:fontRef idx="minor">
+            <a:schemeClr val="lt1"/>
+          </a:fontRef>
+        </p:style>
+        <p:txBody>
+          <a:bodyPr rtlCol="0" anchor="ctr"/>
+          <a:lstStyle/>
+          <a:p>
+            <a:pPr algn="ctr"/>
+          </a:p>
+        </p:txBody>
+      </p:sp>
+      <p:sp>
+        <p:nvSpPr>
+          <p:cNvPr id="43" name="AICOE_GEO_ACCENT_Right Triangle 42"/>
+          <p:cNvSpPr/>
+          <p:nvPr/>
+        </p:nvSpPr>
+        <p:spPr>
+          <a:xfrm rot="5400000">
+            <a:off x="11874246" y="109728"/>
+            <a:ext cx="208026" cy="208026"/>
+          </a:xfrm>
+          <a:prstGeom prst="rtTriangle">
+            <a:avLst/>
+          </a:prstGeom>
+          <a:solidFill>
+            <a:srgbClr val="50E6FF"/>
+          </a:solidFill>
+          <a:ln>
+            <a:noFill/>
+          </a:ln>
+          <a:effectLst/>
+        </p:spPr>
+        <p:style>
+          <a:lnRef idx="1">
+            <a:schemeClr val="accent1"/>
+          </a:lnRef>
+          <a:fillRef idx="3">
+            <a:schemeClr val="accent1"/>
+          </a:fillRef>
+          <a:effectRef idx="2">
+            <a:schemeClr val="accent1"/>
+          </a:effectRef>
+          <a:fontRef idx="minor">
+            <a:schemeClr val="lt1"/>
+          </a:fontRef>
+        </p:style>
+        <p:txBody>
+          <a:bodyPr rtlCol="0" anchor="ctr"/>
+          <a:lstStyle/>
+          <a:p>
+            <a:pPr algn="ctr"/>
+          </a:p>
+        </p:txBody>
+      </p:sp>
     </p:spTree>
   </p:cSld>
   <p:clrMapOvr>
@@ -23561,6 +24925,94 @@
           </a:p>
         </p:txBody>
       </p:sp>
+      <p:sp>
+        <p:nvSpPr>
+          <p:cNvPr id="48" name="AICOE_GEO_ACCENT_Right Triangle 47"/>
+          <p:cNvSpPr/>
+          <p:nvPr/>
+        </p:nvSpPr>
+        <p:spPr>
+          <a:xfrm rot="5400000">
+            <a:off x="11762232" y="109728"/>
+            <a:ext cx="320040" cy="320040"/>
+          </a:xfrm>
+          <a:prstGeom prst="rtTriangle">
+            <a:avLst/>
+          </a:prstGeom>
+          <a:solidFill>
+            <a:srgbClr val="0B1F3A"/>
+          </a:solidFill>
+          <a:ln>
+            <a:noFill/>
+          </a:ln>
+          <a:effectLst/>
+        </p:spPr>
+        <p:style>
+          <a:lnRef idx="1">
+            <a:schemeClr val="accent1"/>
+          </a:lnRef>
+          <a:fillRef idx="3">
+            <a:schemeClr val="accent1"/>
+          </a:fillRef>
+          <a:effectRef idx="2">
+            <a:schemeClr val="accent1"/>
+          </a:effectRef>
+          <a:fontRef idx="minor">
+            <a:schemeClr val="lt1"/>
+          </a:fontRef>
+        </p:style>
+        <p:txBody>
+          <a:bodyPr rtlCol="0" anchor="ctr"/>
+          <a:lstStyle/>
+          <a:p>
+            <a:pPr algn="ctr"/>
+          </a:p>
+        </p:txBody>
+      </p:sp>
+      <p:sp>
+        <p:nvSpPr>
+          <p:cNvPr id="49" name="AICOE_GEO_ACCENT_Right Triangle 48"/>
+          <p:cNvSpPr/>
+          <p:nvPr/>
+        </p:nvSpPr>
+        <p:spPr>
+          <a:xfrm rot="5400000">
+            <a:off x="11874246" y="109728"/>
+            <a:ext cx="208026" cy="208026"/>
+          </a:xfrm>
+          <a:prstGeom prst="rtTriangle">
+            <a:avLst/>
+          </a:prstGeom>
+          <a:solidFill>
+            <a:srgbClr val="50E6FF"/>
+          </a:solidFill>
+          <a:ln>
+            <a:noFill/>
+          </a:ln>
+          <a:effectLst/>
+        </p:spPr>
+        <p:style>
+          <a:lnRef idx="1">
+            <a:schemeClr val="accent1"/>
+          </a:lnRef>
+          <a:fillRef idx="3">
+            <a:schemeClr val="accent1"/>
+          </a:fillRef>
+          <a:effectRef idx="2">
+            <a:schemeClr val="accent1"/>
+          </a:effectRef>
+          <a:fontRef idx="minor">
+            <a:schemeClr val="lt1"/>
+          </a:fontRef>
+        </p:style>
+        <p:txBody>
+          <a:bodyPr rtlCol="0" anchor="ctr"/>
+          <a:lstStyle/>
+          <a:p>
+            <a:pPr algn="ctr"/>
+          </a:p>
+        </p:txBody>
+      </p:sp>
     </p:spTree>
   </p:cSld>
   <p:clrMapOvr>
@@ -25371,6 +26823,94 @@
           </a:p>
         </p:txBody>
       </p:sp>
+      <p:sp>
+        <p:nvSpPr>
+          <p:cNvPr id="52" name="AICOE_GEO_ACCENT_Right Triangle 51"/>
+          <p:cNvSpPr/>
+          <p:nvPr/>
+        </p:nvSpPr>
+        <p:spPr>
+          <a:xfrm rot="5400000">
+            <a:off x="11762232" y="109728"/>
+            <a:ext cx="320040" cy="320040"/>
+          </a:xfrm>
+          <a:prstGeom prst="rtTriangle">
+            <a:avLst/>
+          </a:prstGeom>
+          <a:solidFill>
+            <a:srgbClr val="0B1F3A"/>
+          </a:solidFill>
+          <a:ln>
+            <a:noFill/>
+          </a:ln>
+          <a:effectLst/>
+        </p:spPr>
+        <p:style>
+          <a:lnRef idx="1">
+            <a:schemeClr val="accent1"/>
+          </a:lnRef>
+          <a:fillRef idx="3">
+            <a:schemeClr val="accent1"/>
+          </a:fillRef>
+          <a:effectRef idx="2">
+            <a:schemeClr val="accent1"/>
+          </a:effectRef>
+          <a:fontRef idx="minor">
+            <a:schemeClr val="lt1"/>
+          </a:fontRef>
+        </p:style>
+        <p:txBody>
+          <a:bodyPr rtlCol="0" anchor="ctr"/>
+          <a:lstStyle/>
+          <a:p>
+            <a:pPr algn="ctr"/>
+          </a:p>
+        </p:txBody>
+      </p:sp>
+      <p:sp>
+        <p:nvSpPr>
+          <p:cNvPr id="53" name="AICOE_GEO_ACCENT_Right Triangle 52"/>
+          <p:cNvSpPr/>
+          <p:nvPr/>
+        </p:nvSpPr>
+        <p:spPr>
+          <a:xfrm rot="5400000">
+            <a:off x="11874246" y="109728"/>
+            <a:ext cx="208026" cy="208026"/>
+          </a:xfrm>
+          <a:prstGeom prst="rtTriangle">
+            <a:avLst/>
+          </a:prstGeom>
+          <a:solidFill>
+            <a:srgbClr val="50E6FF"/>
+          </a:solidFill>
+          <a:ln>
+            <a:noFill/>
+          </a:ln>
+          <a:effectLst/>
+        </p:spPr>
+        <p:style>
+          <a:lnRef idx="1">
+            <a:schemeClr val="accent1"/>
+          </a:lnRef>
+          <a:fillRef idx="3">
+            <a:schemeClr val="accent1"/>
+          </a:fillRef>
+          <a:effectRef idx="2">
+            <a:schemeClr val="accent1"/>
+          </a:effectRef>
+          <a:fontRef idx="minor">
+            <a:schemeClr val="lt1"/>
+          </a:fontRef>
+        </p:style>
+        <p:txBody>
+          <a:bodyPr rtlCol="0" anchor="ctr"/>
+          <a:lstStyle/>
+          <a:p>
+            <a:pPr algn="ctr"/>
+          </a:p>
+        </p:txBody>
+      </p:sp>
     </p:spTree>
   </p:cSld>
   <p:clrMapOvr>
@@ -26821,6 +28361,94 @@
           </a:p>
         </p:txBody>
       </p:sp>
+      <p:sp>
+        <p:nvSpPr>
+          <p:cNvPr id="40" name="AICOE_GEO_ACCENT_Right Triangle 39"/>
+          <p:cNvSpPr/>
+          <p:nvPr/>
+        </p:nvSpPr>
+        <p:spPr>
+          <a:xfrm rot="5400000">
+            <a:off x="11762232" y="109728"/>
+            <a:ext cx="320040" cy="320040"/>
+          </a:xfrm>
+          <a:prstGeom prst="rtTriangle">
+            <a:avLst/>
+          </a:prstGeom>
+          <a:solidFill>
+            <a:srgbClr val="0B1F3A"/>
+          </a:solidFill>
+          <a:ln>
+            <a:noFill/>
+          </a:ln>
+          <a:effectLst/>
+        </p:spPr>
+        <p:style>
+          <a:lnRef idx="1">
+            <a:schemeClr val="accent1"/>
+          </a:lnRef>
+          <a:fillRef idx="3">
+            <a:schemeClr val="accent1"/>
+          </a:fillRef>
+          <a:effectRef idx="2">
+            <a:schemeClr val="accent1"/>
+          </a:effectRef>
+          <a:fontRef idx="minor">
+            <a:schemeClr val="lt1"/>
+          </a:fontRef>
+        </p:style>
+        <p:txBody>
+          <a:bodyPr rtlCol="0" anchor="ctr"/>
+          <a:lstStyle/>
+          <a:p>
+            <a:pPr algn="ctr"/>
+          </a:p>
+        </p:txBody>
+      </p:sp>
+      <p:sp>
+        <p:nvSpPr>
+          <p:cNvPr id="41" name="AICOE_GEO_ACCENT_Right Triangle 40"/>
+          <p:cNvSpPr/>
+          <p:nvPr/>
+        </p:nvSpPr>
+        <p:spPr>
+          <a:xfrm rot="5400000">
+            <a:off x="11874246" y="109728"/>
+            <a:ext cx="208026" cy="208026"/>
+          </a:xfrm>
+          <a:prstGeom prst="rtTriangle">
+            <a:avLst/>
+          </a:prstGeom>
+          <a:solidFill>
+            <a:srgbClr val="50E6FF"/>
+          </a:solidFill>
+          <a:ln>
+            <a:noFill/>
+          </a:ln>
+          <a:effectLst/>
+        </p:spPr>
+        <p:style>
+          <a:lnRef idx="1">
+            <a:schemeClr val="accent1"/>
+          </a:lnRef>
+          <a:fillRef idx="3">
+            <a:schemeClr val="accent1"/>
+          </a:fillRef>
+          <a:effectRef idx="2">
+            <a:schemeClr val="accent1"/>
+          </a:effectRef>
+          <a:fontRef idx="minor">
+            <a:schemeClr val="lt1"/>
+          </a:fontRef>
+        </p:style>
+        <p:txBody>
+          <a:bodyPr rtlCol="0" anchor="ctr"/>
+          <a:lstStyle/>
+          <a:p>
+            <a:pPr algn="ctr"/>
+          </a:p>
+        </p:txBody>
+      </p:sp>
     </p:spTree>
   </p:cSld>
   <p:clrMapOvr>
@@ -28236,6 +29864,94 @@
               <a:t>9 / 18</a:t>
             </a:r>
             <a:endParaRPr lang="en-US" sz="900" dirty="0"/>
+          </a:p>
+        </p:txBody>
+      </p:sp>
+      <p:sp>
+        <p:nvSpPr>
+          <p:cNvPr id="40" name="AICOE_GEO_ACCENT_Right Triangle 39"/>
+          <p:cNvSpPr/>
+          <p:nvPr/>
+        </p:nvSpPr>
+        <p:spPr>
+          <a:xfrm rot="5400000">
+            <a:off x="11762232" y="109728"/>
+            <a:ext cx="320040" cy="320040"/>
+          </a:xfrm>
+          <a:prstGeom prst="rtTriangle">
+            <a:avLst/>
+          </a:prstGeom>
+          <a:solidFill>
+            <a:srgbClr val="0B1F3A"/>
+          </a:solidFill>
+          <a:ln>
+            <a:noFill/>
+          </a:ln>
+          <a:effectLst/>
+        </p:spPr>
+        <p:style>
+          <a:lnRef idx="1">
+            <a:schemeClr val="accent1"/>
+          </a:lnRef>
+          <a:fillRef idx="3">
+            <a:schemeClr val="accent1"/>
+          </a:fillRef>
+          <a:effectRef idx="2">
+            <a:schemeClr val="accent1"/>
+          </a:effectRef>
+          <a:fontRef idx="minor">
+            <a:schemeClr val="lt1"/>
+          </a:fontRef>
+        </p:style>
+        <p:txBody>
+          <a:bodyPr rtlCol="0" anchor="ctr"/>
+          <a:lstStyle/>
+          <a:p>
+            <a:pPr algn="ctr"/>
+          </a:p>
+        </p:txBody>
+      </p:sp>
+      <p:sp>
+        <p:nvSpPr>
+          <p:cNvPr id="41" name="AICOE_GEO_ACCENT_Right Triangle 40"/>
+          <p:cNvSpPr/>
+          <p:nvPr/>
+        </p:nvSpPr>
+        <p:spPr>
+          <a:xfrm rot="5400000">
+            <a:off x="11874246" y="109728"/>
+            <a:ext cx="208026" cy="208026"/>
+          </a:xfrm>
+          <a:prstGeom prst="rtTriangle">
+            <a:avLst/>
+          </a:prstGeom>
+          <a:solidFill>
+            <a:srgbClr val="50E6FF"/>
+          </a:solidFill>
+          <a:ln>
+            <a:noFill/>
+          </a:ln>
+          <a:effectLst/>
+        </p:spPr>
+        <p:style>
+          <a:lnRef idx="1">
+            <a:schemeClr val="accent1"/>
+          </a:lnRef>
+          <a:fillRef idx="3">
+            <a:schemeClr val="accent1"/>
+          </a:fillRef>
+          <a:effectRef idx="2">
+            <a:schemeClr val="accent1"/>
+          </a:effectRef>
+          <a:fontRef idx="minor">
+            <a:schemeClr val="lt1"/>
+          </a:fontRef>
+        </p:style>
+        <p:txBody>
+          <a:bodyPr rtlCol="0" anchor="ctr"/>
+          <a:lstStyle/>
+          <a:p>
+            <a:pPr algn="ctr"/>
           </a:p>
         </p:txBody>
       </p:sp>
